--- a/docs/答辩PPT.pptx
+++ b/docs/答辩PPT.pptx
@@ -952,7 +952,7 @@
           <a:p>
             <a:r>
               <a:rPr lang="en-US" dirty="0"/>
-              <a:t>现场必演：点一处构件展示考据卡。回答追问时强调——考据过程纠正过两处初期误引（散斗/齐心斗高度），纠错痕迹留在 AIGC 记录里。</a:t>
+              <a:t>现场必演：点一处构件展示考据卡。回答追问时强调——考据过程纠正过两处初期误引（散斗/齐心斗高度），纠错痕迹留在创作过程记录里。</a:t>
             </a:r>
             <a:endParaRPr lang="en-US" dirty="0"/>
           </a:p>
@@ -1873,7 +1873,7 @@
                 <a:ea typeface="宋体" pitchFamily="34" charset="-122"/>
                 <a:cs typeface="宋体" pitchFamily="34" charset="-120"/>
               </a:rPr>
-              <a:t>營造</a:t>
+              <a:t>大木</a:t>
             </a:r>
             <a:endParaRPr lang="en-US" sz="2600" dirty="0"/>
           </a:p>
@@ -1912,7 +1912,7 @@
                 <a:ea typeface="微软雅黑" pitchFamily="34" charset="-122"/>
                 <a:cs typeface="微软雅黑" pitchFamily="34" charset="-120"/>
               </a:rPr>
-              <a:t>YINGZAO</a:t>
+              <a:t>DAMUZUO</a:t>
             </a:r>
             <a:endParaRPr lang="en-US" sz="1300" dirty="0"/>
           </a:p>
@@ -1951,7 +1951,7 @@
                 <a:ea typeface="宋体" pitchFamily="34" charset="-122"/>
                 <a:cs typeface="宋体" pitchFamily="34" charset="-120"/>
               </a:rPr>
-              <a:t>《营造》</a:t>
+              <a:t>《大木作》</a:t>
             </a:r>
             <a:endParaRPr lang="en-US" sz="6600" dirty="0"/>
           </a:p>
@@ -2029,7 +2029,7 @@
                 <a:ea typeface="微软雅黑" pitchFamily="34" charset="-122"/>
                 <a:cs typeface="微软雅黑" pitchFamily="34" charset="-120"/>
               </a:rPr>
-              <a:t>可拆 · 可拼 · 可改 · 可造 —— 让用户亲手参与非遗，而不只是观看</a:t>
+              <a:t>可拆 · 可拼 · 可改 · 可造，让用户亲手参与非遗营造</a:t>
             </a:r>
             <a:endParaRPr lang="en-US" sz="1600" dirty="0"/>
           </a:p>
@@ -2068,7 +2068,7 @@
                 <a:ea typeface="微软雅黑" pitchFamily="34" charset="-122"/>
                 <a:cs typeface="微软雅黑" pitchFamily="34" charset="-120"/>
               </a:rPr>
-              <a:t>全国大学生数字媒体科技作品及创意竞赛 · AIGC 类数字创意作品创作专项赛道</a:t>
+              <a:t>全国大学生数字媒体科技作品及创意竞赛 · 民族文化，创新表达</a:t>
             </a:r>
             <a:endParaRPr lang="en-US" sz="1400" dirty="0"/>
           </a:p>
@@ -2082,18 +2082,35 @@
         </p:nvSpPr>
         <p:spPr>
           <a:xfrm>
-            <a:off x="548640" y="5532120"/>
-            <a:ext cx="10058400" cy="365760"/>
-          </a:xfrm>
-          <a:prstGeom prst="rect">
-            <a:avLst/>
-          </a:prstGeom>
-          <a:noFill/>
-          <a:ln/>
-        </p:spPr>
-        <p:txBody>
-          <a:bodyPr wrap="square" lIns="0" tIns="0" rIns="0" bIns="0" rtlCol="0" anchor="ctr"/>
-          <a:lstStyle/>
+            <a:off x="548640" y="5440680"/>
+            <a:ext cx="10058400" cy="822960"/>
+          </a:xfrm>
+          <a:prstGeom prst="rect">
+            <a:avLst/>
+          </a:prstGeom>
+          <a:noFill/>
+          <a:ln/>
+        </p:spPr>
+        <p:txBody>
+          <a:bodyPr wrap="square" lIns="0" tIns="0" rIns="0" bIns="0" rtlCol="0" anchor="ctr"/>
+          <a:lstStyle/>
+          <a:p>
+            <a:pPr indent="0" marL="0">
+              <a:buNone/>
+            </a:pPr>
+            <a:r>
+              <a:rPr lang="en-US" sz="1600" b="1" dirty="0">
+                <a:solidFill>
+                  <a:srgbClr val="ECE4D4"/>
+                </a:solidFill>
+                <a:latin typeface="微软雅黑" pitchFamily="34" charset="0"/>
+                <a:ea typeface="微软雅黑" pitchFamily="34" charset="-122"/>
+                <a:cs typeface="微软雅黑" pitchFamily="34" charset="-120"/>
+              </a:rPr>
+              <a:t>南昌航空大学科技学院</a:t>
+            </a:r>
+            <a:endParaRPr lang="en-US" sz="1600" dirty="0"/>
+          </a:p>
           <a:p>
             <a:pPr indent="0" marL="0">
               <a:buNone/>
@@ -2107,7 +2124,7 @@
                 <a:ea typeface="微软雅黑" pitchFamily="34" charset="-122"/>
                 <a:cs typeface="微软雅黑" pitchFamily="34" charset="-120"/>
               </a:rPr>
-              <a:t>参赛团队：【团队名称】    指导教师：【指导教师姓名】    2026 年 9 月</a:t>
+              <a:t>参赛团队：刘奉淳、陈邦楠、张进超、周涛　　指导教师：段欣妤、陈超　　2026 年 10 月</a:t>
             </a:r>
             <a:endParaRPr lang="en-US" sz="1400" dirty="0"/>
           </a:p>
@@ -2361,7 +2378,7 @@
                 <a:ea typeface="微软雅黑" pitchFamily="34" charset="-122"/>
                 <a:cs typeface="微软雅黑" pitchFamily="34" charset="-120"/>
               </a:rPr>
-              <a:t>材分八等 / 构件尺寸 / 铺作次序 —— 每项标注文献卷次</a:t>
+              <a:t>材分八等 / 构件尺寸 / 铺作次序：每项标注文献卷次</a:t>
             </a:r>
             <a:endParaRPr lang="en-US" sz="1300" dirty="0"/>
           </a:p>
@@ -2466,7 +2483,7 @@
                 <a:ea typeface="微软雅黑" pitchFamily="34" charset="-122"/>
                 <a:cs typeface="微软雅黑" pitchFamily="34" charset="-120"/>
               </a:rPr>
-              <a:t>斗（U 形截面）/ 栱（卷杀轮廓）/ 榫卯（分件装配）—— 零外部模型</a:t>
+              <a:t>斗（U 形截面）/ 栱（卷杀轮廓）/ 榫卯（分件装配）：零外部模型</a:t>
             </a:r>
             <a:endParaRPr lang="en-US" sz="1300" dirty="0"/>
           </a:p>
@@ -3722,7 +3739,7 @@
                 <a:ea typeface="微软雅黑" pitchFamily="34" charset="-122"/>
                 <a:cs typeface="微软雅黑" pitchFamily="34" charset="-120"/>
               </a:rPr>
-              <a:t>AIGC 参与说明 · 人机分工</a:t>
+              <a:t>创作方法 · 团队协作</a:t>
             </a:r>
             <a:endParaRPr lang="en-US" sz="3000" dirty="0"/>
           </a:p>
@@ -3761,7 +3778,7 @@
                 <a:ea typeface="微软雅黑" pitchFamily="34" charset="-122"/>
                 <a:cs typeface="微软雅黑" pitchFamily="34" charset="-120"/>
               </a:rPr>
-              <a:t>AIGC COLLABORATION</a:t>
+              <a:t>METHODOLOGY</a:t>
             </a:r>
             <a:endParaRPr lang="en-US" sz="1200" dirty="0"/>
           </a:p>
@@ -3873,7 +3890,7 @@
                 <a:ea typeface="微软雅黑" pitchFamily="34" charset="-122"/>
                 <a:cs typeface="微软雅黑" pitchFamily="34" charset="-120"/>
               </a:rPr>
-              <a:t>人（不可替代）</a:t>
+              <a:t>团队职责</a:t>
             </a:r>
             <a:endParaRPr lang="en-US" sz="2000" dirty="0"/>
           </a:p>
@@ -3913,7 +3930,7 @@
                 <a:ea typeface="微软雅黑" pitchFamily="34" charset="-122"/>
                 <a:cs typeface="微软雅黑" pitchFamily="34" charset="-120"/>
               </a:rPr>
-              <a:t>选题立意与赛道决策</a:t>
+              <a:t>选题立意与方向决策</a:t>
             </a:r>
             <a:endParaRPr lang="en-US" sz="1500" dirty="0"/>
           </a:p>
@@ -3953,7 +3970,7 @@
                 <a:ea typeface="微软雅黑" pitchFamily="34" charset="-122"/>
                 <a:cs typeface="微软雅黑" pitchFamily="34" charset="-120"/>
               </a:rPr>
-              <a:t>形制审校与最终把关</a:t>
+              <a:t>典籍考据与形制审校</a:t>
             </a:r>
             <a:endParaRPr lang="en-US" sz="1500" dirty="0"/>
           </a:p>
@@ -3993,7 +4010,7 @@
                 <a:ea typeface="微软雅黑" pitchFamily="34" charset="-122"/>
                 <a:cs typeface="微软雅黑" pitchFamily="34" charset="-120"/>
               </a:rPr>
-              <a:t>团队事务与现场答辩</a:t>
+              <a:t>构件复核与现场答辩</a:t>
             </a:r>
             <a:endParaRPr lang="en-US" sz="1500" dirty="0"/>
           </a:p>
@@ -4106,7 +4123,7 @@
                 <a:ea typeface="微软雅黑" pitchFamily="34" charset="-122"/>
                 <a:cs typeface="微软雅黑" pitchFamily="34" charset="-120"/>
               </a:rPr>
-              <a:t>AI（深度参与）</a:t>
+              <a:t>技术工具</a:t>
             </a:r>
             <a:endParaRPr lang="en-US" sz="2000" dirty="0"/>
           </a:p>
@@ -4146,7 +4163,7 @@
                 <a:ea typeface="微软雅黑" pitchFamily="34" charset="-122"/>
                 <a:cs typeface="微软雅黑" pitchFamily="34" charset="-120"/>
               </a:rPr>
-              <a:t>代码实现与算法构建</a:t>
+              <a:t>代码工程与算法实现</a:t>
             </a:r>
             <a:endParaRPr lang="en-US" sz="1500" dirty="0"/>
           </a:p>
@@ -4186,7 +4203,7 @@
                 <a:ea typeface="微软雅黑" pitchFamily="34" charset="-122"/>
                 <a:cs typeface="微软雅黑" pitchFamily="34" charset="-120"/>
               </a:rPr>
-              <a:t>文献检索与考据核验</a:t>
+              <a:t>文献检索与数据校核</a:t>
             </a:r>
             <a:endParaRPr lang="en-US" sz="1500" dirty="0"/>
           </a:p>
@@ -4226,7 +4243,7 @@
                 <a:ea typeface="微软雅黑" pitchFamily="34" charset="-122"/>
                 <a:cs typeface="微软雅黑" pitchFamily="34" charset="-120"/>
               </a:rPr>
-              <a:t>文档起草与数据整理</a:t>
+              <a:t>文档起草与资料整理</a:t>
             </a:r>
             <a:endParaRPr lang="en-US" sz="1500" dirty="0"/>
           </a:p>
@@ -4266,7 +4283,7 @@
                 <a:ea typeface="微软雅黑" pitchFamily="34" charset="-122"/>
                 <a:cs typeface="微软雅黑" pitchFamily="34" charset="-120"/>
               </a:rPr>
-              <a:t>测试验证与问题定位</a:t>
+              <a:t>测试验证与缺陷定位</a:t>
             </a:r>
             <a:endParaRPr lang="en-US" sz="1500" dirty="0"/>
           </a:p>
@@ -4339,7 +4356,7 @@
                 <a:ea typeface="微软雅黑" pitchFamily="34" charset="-122"/>
                 <a:cs typeface="微软雅黑" pitchFamily="34" charset="-120"/>
               </a:rPr>
-              <a:t>过程全程留痕：《AIGC 创作过程记录》逐日保存技术决策、考据来源、版本演进与问题修复——可现场调阅。</a:t>
+              <a:t>过程全程留痕：《AI协作过程记录》逐日保存技术决策、考据来源与问题修复，如实记录工具参与范围，可现场调阅。</a:t>
             </a:r>
             <a:endParaRPr lang="en-US" sz="1400" dirty="0"/>
           </a:p>
@@ -4395,7 +4412,7 @@
                 <a:ea typeface="宋体" pitchFamily="34" charset="-122"/>
                 <a:cs typeface="宋体" pitchFamily="34" charset="-120"/>
               </a:rPr>
-              <a:t>八百年前的匠人用一套模数编织整座殿宇，今天的我们用同样的思想驱动算法。</a:t>
+              <a:t>这套模数思想撑起了宋代殿宇的形制，也是《大木作》算法的起点。</a:t>
             </a:r>
             <a:endParaRPr lang="en-US" sz="1700" dirty="0"/>
           </a:p>
@@ -4466,7 +4483,7 @@
                 <a:ea typeface="微软雅黑" pitchFamily="34" charset="-122"/>
                 <a:cs typeface="微软雅黑" pitchFamily="34" charset="-120"/>
               </a:rPr>
-              <a:t>为什么做《营造》</a:t>
+              <a:t>为什么做《大木作》</a:t>
             </a:r>
             <a:endParaRPr lang="en-US" sz="3000" dirty="0"/>
           </a:p>
@@ -4505,7 +4522,7 @@
                 <a:ea typeface="微软雅黑" pitchFamily="34" charset="-122"/>
                 <a:cs typeface="微软雅黑" pitchFamily="34" charset="-120"/>
               </a:rPr>
-              <a:t>WHY YINGZAO</a:t>
+              <a:t>WHY DAMUZUO</a:t>
             </a:r>
             <a:endParaRPr lang="en-US" sz="1200" dirty="0"/>
           </a:p>
@@ -4583,7 +4600,7 @@
                 <a:ea typeface="微软雅黑" pitchFamily="34" charset="-122"/>
                 <a:cs typeface="微软雅黑" pitchFamily="34" charset="-120"/>
               </a:rPr>
-              <a:t>斗栱是中国木构建筑的核心智慧，但公众认知正在断层——</a:t>
+              <a:t>斗栱是中国木构建筑的核心，但公众对它的认知正在断层。</a:t>
             </a:r>
             <a:endParaRPr lang="en-US" sz="2200" dirty="0"/>
           </a:p>
@@ -4967,7 +4984,7 @@
                 <a:ea typeface="微软雅黑" pitchFamily="34" charset="-122"/>
                 <a:cs typeface="微软雅黑" pitchFamily="34" charset="-120"/>
               </a:rPr>
-              <a:t>《营造》的回答：</a:t>
+              <a:t>《大木作》的回答：</a:t>
             </a:r>
             <a:pPr indent="0" marL="0">
               <a:buNone/>
@@ -4981,7 +4998,7 @@
                 <a:ea typeface="微软雅黑" pitchFamily="34" charset="-122"/>
                 <a:cs typeface="微软雅黑" pitchFamily="34" charset="-120"/>
               </a:rPr>
-              <a:t>把形制规则变成算法，让每个人都能亲手把一朵斗栱拼回去。</a:t>
+              <a:t>把形制规则写成算法，让每个人都能亲手拼出一朵斗栱。</a:t>
             </a:r>
             <a:endParaRPr lang="en-US" sz="2400" dirty="0"/>
           </a:p>
@@ -5020,7 +5037,7 @@
                 <a:ea typeface="宋体" pitchFamily="34" charset="-122"/>
                 <a:cs typeface="宋体" pitchFamily="34" charset="-120"/>
               </a:rPr>
-              <a:t>对非遗最好的保护不是封存，而是让每一个人都能亲手参与。</a:t>
+              <a:t>与其把非遗封存起来，不如让人亲手参与。</a:t>
             </a:r>
             <a:endParaRPr lang="en-US" sz="1600" dirty="0"/>
           </a:p>
@@ -5208,7 +5225,7 @@
                 <a:ea typeface="微软雅黑" pitchFamily="34" charset="-122"/>
                 <a:cs typeface="微软雅黑" pitchFamily="34" charset="-120"/>
               </a:rPr>
-              <a:t>围绕「认 → 拼 → 改 → 造」的递进闭环组织</a:t>
+              <a:t>按「认 → 拼 → 改 → 造」的顺序组织</a:t>
             </a:r>
             <a:endParaRPr lang="en-US" sz="1600" dirty="0"/>
           </a:p>
@@ -5362,7 +5379,7 @@
                 <a:ea typeface="微软雅黑" pitchFamily="34" charset="-122"/>
                 <a:cs typeface="微软雅黑" pitchFamily="34" charset="-120"/>
               </a:rPr>
-              <a:t>点击构件读考据</a:t>
+              <a:t>点击构件看考据</a:t>
             </a:r>
             <a:endParaRPr lang="en-US" sz="1300" dirty="0"/>
           </a:p>
@@ -5382,7 +5399,7 @@
                 <a:ea typeface="微软雅黑" pitchFamily="34" charset="-122"/>
                 <a:cs typeface="微软雅黑" pitchFamily="34" charset="-120"/>
               </a:rPr>
-              <a:t>每个数字有出处</a:t>
+              <a:t>每个数字都有出处</a:t>
             </a:r>
             <a:endParaRPr lang="en-US" sz="1300" dirty="0"/>
           </a:p>
@@ -6446,7 +6463,7 @@
                 <a:ea typeface="微软雅黑" pitchFamily="34" charset="-122"/>
                 <a:cs typeface="微软雅黑" pitchFamily="34" charset="-120"/>
               </a:rPr>
-              <a:t>点击任意构件，读它的形制尺寸与文献出处——</a:t>
+              <a:t>点击任意构件，查看它的形制尺寸与文献出处。</a:t>
             </a:r>
             <a:endParaRPr lang="en-US" sz="1500" dirty="0"/>
           </a:p>
@@ -6466,7 +6483,7 @@
                 <a:ea typeface="微软雅黑" pitchFamily="34" charset="-122"/>
                 <a:cs typeface="微软雅黑" pitchFamily="34" charset="-120"/>
               </a:rPr>
-              <a:t>界面里出现的每一个数字，都能回答「出处是哪一卷」。</a:t>
+              <a:t>界面上出现的每个数字，都能查到出自哪一卷。</a:t>
             </a:r>
             <a:endParaRPr lang="en-US" sz="1500" dirty="0"/>
           </a:p>
@@ -7068,7 +7085,7 @@
                 <a:ea typeface="微软雅黑" pitchFamily="34" charset="-122"/>
                 <a:cs typeface="微软雅黑" pitchFamily="34" charset="-120"/>
               </a:rPr>
-              <a:t>玩法即知识</a:t>
+              <a:t>拼装就是学习</a:t>
             </a:r>
             <a:endParaRPr lang="en-US" sz="2200" dirty="0"/>
           </a:p>
@@ -7111,7 +7128,7 @@
                 <a:ea typeface="微软雅黑" pitchFamily="34" charset="-122"/>
                 <a:cs typeface="微软雅黑" pitchFamily="34" charset="-120"/>
               </a:rPr>
-              <a:t>整朵铺作按《营造法式》铺作次序拆散——</a:t>
+              <a:t>整朵铺作按《营造法式》的铺作次序拆散。</a:t>
             </a:r>
             <a:endParaRPr lang="en-US" sz="1500" dirty="0"/>
           </a:p>
@@ -7132,7 +7149,7 @@
                 <a:ea typeface="微软雅黑" pitchFamily="34" charset="-122"/>
                 <a:cs typeface="微软雅黑" pitchFamily="34" charset="-120"/>
               </a:rPr>
-              <a:t>从构件盘选出下一件，选对飞回原位、木质「咔哒」声；</a:t>
+              <a:t>从构件盘里选出下一件：选对，构件飞回原位，伴随木质「咔哒」声；</a:t>
             </a:r>
             <a:endParaRPr lang="en-US" sz="1500" dirty="0"/>
           </a:p>
@@ -7153,7 +7170,7 @@
                 <a:ea typeface="微软雅黑" pitchFamily="34" charset="-122"/>
                 <a:cs typeface="微软雅黑" pitchFamily="34" charset="-120"/>
               </a:rPr>
-              <a:t>选错会晃动并计入错误，落成后评定甲 / 乙 / 丙；</a:t>
+              <a:t>选错，构件晃动并计入错误。落成后评定甲 / 乙 / 丙；</a:t>
             </a:r>
             <a:endParaRPr lang="en-US" sz="1500" dirty="0"/>
           </a:p>
@@ -7540,7 +7557,7 @@
                 <a:ea typeface="微软雅黑" pitchFamily="34" charset="-122"/>
                 <a:cs typeface="微软雅黑" pitchFamily="34" charset="-120"/>
               </a:rPr>
-              <a:t>材有八等，度屋之大小，因而用之——拖动材等滑杆，同一朵铺作按材等比例缩放，并实时换算真实尺寸（宋尺一尺约 31.2 厘米）。</a:t>
+              <a:t>材有八等，度屋之大小，因而用之。拖动材等滑杆，同一朵铺作按材等比例缩放，并实时换算真实尺寸（宋尺一尺约 31.2 厘米）。</a:t>
             </a:r>
             <a:endParaRPr lang="en-US" sz="1500" dirty="0"/>
           </a:p>
@@ -9430,7 +9447,7 @@
                 <a:ea typeface="微软雅黑" pitchFamily="34" charset="-122"/>
                 <a:cs typeface="微软雅黑" pitchFamily="34" charset="-120"/>
               </a:rPr>
-              <a:t>斗栱抗震 · 让结构原理可被亲手验证</a:t>
+              <a:t>斗栱抗震 · 亲手验证结构原理</a:t>
             </a:r>
             <a:endParaRPr lang="en-US" sz="3000" dirty="0"/>
           </a:p>
@@ -9688,7 +9705,7 @@
                 <a:ea typeface="微软雅黑" pitchFamily="34" charset="-122"/>
                 <a:cs typeface="微软雅黑" pitchFamily="34" charset="-120"/>
               </a:rPr>
-              <a:t>斗栱连接 · 屋面响应衰减至地面 1/3（减震 68%）</a:t>
+              <a:t>斗栱连接 · 屋面响应衰减至地面 1/3（减震 67%）</a:t>
             </a:r>
             <a:endParaRPr lang="en-US" sz="1400" dirty="0"/>
           </a:p>
@@ -10335,7 +10352,7 @@
                 <a:ea typeface="微软雅黑" pitchFamily="34" charset="-122"/>
                 <a:cs typeface="微软雅黑" pitchFamily="34" charset="-120"/>
               </a:rPr>
-              <a:t>日暮灯光随轴线推移：主光转橙红西沉，天幕与雾色渐变——终章收在「不用一钉一铆」。</a:t>
+              <a:t>日暮灯光随轴线推移：主光转橙红西沉，天幕与雾色渐变，最后收在「不用一钉一铆」。</a:t>
             </a:r>
             <a:endParaRPr lang="en-US" sz="1300" dirty="0"/>
           </a:p>

--- a/docs/答辩PPT.pptx
+++ b/docs/答辩PPT.pptx
@@ -1304,7 +1304,7 @@
           <a:p>
             <a:r>
               <a:rPr lang="en-US" dirty="0"/>
-              <a:t>全场最强记忆点。建议流程：先切「刚性连接」开大震让屋面狂甩，再切「斗栱连接」——示波器亮线明显收敛，减震 68% 大字读数。停两秒让评委看清。</a:t>
+              <a:t>全场最强记忆点。建议流程：先切「刚性连接」开大震让屋面狂甩，再切「斗栱连接」——示波器亮线明显收敛，减震 67% 大字读数。停两秒让评委看清。</a:t>
             </a:r>
             <a:endParaRPr lang="en-US" dirty="0"/>
           </a:p>
@@ -9588,7 +9588,7 @@
                 <a:ea typeface="微软雅黑" pitchFamily="34" charset="-122"/>
                 <a:cs typeface="微软雅黑" pitchFamily="34" charset="-120"/>
               </a:rPr>
-              <a:t>▲ 振动台 + 位移示波器（实测中震 16 分 / 2Hz）</a:t>
+              <a:t>▲ 振动台 + 位移示波器（实测中震 7 级 / 2Hz）</a:t>
             </a:r>
             <a:endParaRPr lang="en-US" sz="1100" dirty="0"/>
           </a:p>
@@ -9898,7 +9898,7 @@
                 <a:ea typeface="微软雅黑" pitchFamily="34" charset="-122"/>
                 <a:cs typeface="微软雅黑" pitchFamily="34" charset="-120"/>
               </a:rPr>
-              <a:t>数据来源：作品内置模型实测（振幅 16 分、频率 2Hz、采样 5 秒）；呼应案例：应县木塔、晋祠圣母殿</a:t>
+              <a:t>数据来源：作品内置模型实测（震级 7 级、频率 2Hz、采样 5 秒）；呼应案例：应县木塔、晋祠圣母殿</a:t>
             </a:r>
             <a:endParaRPr lang="en-US" sz="1100" dirty="0"/>
           </a:p>

--- a/docs/答辩PPT.pptx
+++ b/docs/答辩PPT.pptx
@@ -1304,7 +1304,7 @@
           <a:p>
             <a:r>
               <a:rPr lang="en-US" dirty="0"/>
-              <a:t>全场最强记忆点。建议流程：先切「刚性连接」开大震让屋面狂甩，再切「斗栱连接」——示波器亮线明显收敛，减震 67% 大字读数。停两秒让评委看清。</a:t>
+              <a:t>全场最强记忆点。建议流程：先切「刚性连接」开大震让屋面狂甩，再切「斗栱连接」——示波器亮线明显收敛，减震 70% 大字读数。停两秒让评委看清。</a:t>
             </a:r>
             <a:endParaRPr lang="en-US" dirty="0"/>
           </a:p>
@@ -9666,7 +9666,7 @@
                 <a:ea typeface="微软雅黑" pitchFamily="34" charset="-122"/>
                 <a:cs typeface="微软雅黑" pitchFamily="34" charset="-120"/>
               </a:rPr>
-              <a:t>0.33×</a:t>
+              <a:t>0.30×</a:t>
             </a:r>
             <a:endParaRPr lang="en-US" sz="5400" dirty="0"/>
           </a:p>
@@ -9705,7 +9705,7 @@
                 <a:ea typeface="微软雅黑" pitchFamily="34" charset="-122"/>
                 <a:cs typeface="微软雅黑" pitchFamily="34" charset="-120"/>
               </a:rPr>
-              <a:t>斗栱连接 · 屋面响应衰减至地面 1/3（减震 67%）</a:t>
+              <a:t>斗栱连接 · 屋面响应衰减至地面 30%（减震 70%）</a:t>
             </a:r>
             <a:endParaRPr lang="en-US" sz="1400" dirty="0"/>
           </a:p>
@@ -9744,7 +9744,7 @@
                 <a:ea typeface="微软雅黑" pitchFamily="34" charset="-122"/>
                 <a:cs typeface="微软雅黑" pitchFamily="34" charset="-120"/>
               </a:rPr>
-              <a:t>1.31×</a:t>
+              <a:t>1.33×</a:t>
             </a:r>
             <a:endParaRPr lang="en-US" sz="5400" dirty="0"/>
           </a:p>

--- a/docs/答辩PPT.pptx
+++ b/docs/答辩PPT.pptx
@@ -3057,7 +3057,7 @@
                           <a:ea typeface="微软雅黑" pitchFamily="34" charset="-122"/>
                           <a:cs typeface="微软雅黑" pitchFamily="34" charset="-120"/>
                         </a:rPr>
-                        <a:t>42.75 KB</a:t>
+                        <a:t>73.40 KB</a:t>
                       </a:r>
                       <a:endParaRPr lang="en-US" sz="1200" dirty="0">
                         <a:latin typeface="微软雅黑" charset="0"/>
@@ -3263,7 +3263,7 @@
                           <a:ea typeface="微软雅黑" pitchFamily="34" charset="-122"/>
                           <a:cs typeface="微软雅黑" pitchFamily="34" charset="-120"/>
                         </a:rPr>
-                        <a:t>498.72 KB</a:t>
+                        <a:t>487.03 KB</a:t>
                       </a:r>
                       <a:endParaRPr lang="en-US" sz="1200" dirty="0">
                         <a:latin typeface="微软雅黑" charset="0"/>
@@ -3469,7 +3469,7 @@
                           <a:ea typeface="微软雅黑" pitchFamily="34" charset="-122"/>
                           <a:cs typeface="微软雅黑" pitchFamily="34" charset="-120"/>
                         </a:rPr>
-                        <a:t>38.15 KB</a:t>
+                        <a:t>39.64 KB</a:t>
                       </a:r>
                       <a:endParaRPr lang="en-US" sz="1200" dirty="0">
                         <a:latin typeface="微软雅黑" charset="0"/>
@@ -3629,7 +3629,7 @@
                 <a:ea typeface="微软雅黑" pitchFamily="34" charset="-122"/>
                 <a:cs typeface="微软雅黑" pitchFamily="34" charset="-120"/>
               </a:rPr>
-              <a:t>gzip 后主包仅 19.66 KB；首屏零图片请求（纹理全部运行时生成）；移动端自动降档。</a:t>
+              <a:t>gzip 后主包仅 27.46 KB；首屏零图片请求（纹理全部运行时生成）；移动端自动降档。</a:t>
             </a:r>
             <a:endParaRPr lang="en-US" sz="1300" dirty="0"/>
           </a:p>
@@ -3668,7 +3668,7 @@
                 <a:ea typeface="微软雅黑" pitchFamily="34" charset="-122"/>
                 <a:cs typeface="微软雅黑" pitchFamily="34" charset="-120"/>
               </a:rPr>
-              <a:t>数据来源：vite build 产物实测（2026-09）</a:t>
+              <a:t>数据来源：vite build 产物实测（2026-10）</a:t>
             </a:r>
             <a:endParaRPr lang="en-US" sz="1100" dirty="0"/>
           </a:p>
